--- a/public/fun/cards/life/life-25.pptx
+++ b/public/fun/cards/life/life-25.pptx
@@ -3099,72 +3099,14 @@
       <p:grpSpPr/>
       <p:sp>
         <p:nvSpPr>
-          <p:cNvPr id="2" name="Oval 1"/>
-          <p:cNvSpPr/>
+          <p:cNvPr id="2" name="텍스트"/>
+          <p:cNvSpPr txBox="1"/>
           <p:nvPr/>
         </p:nvSpPr>
         <p:spPr>
           <a:xfrm>
-            <a:off x="187200" y="403200"/>
-            <a:ext cx="993600" cy="993600"/>
-          </a:xfrm>
-          <a:prstGeom prst="ellipse">
-            <a:avLst/>
-          </a:prstGeom>
-          <a:noFill/>
-          <a:ln w="14400">
-            <a:solidFill>
-              <a:srgbClr val="F5E3CC"/>
-            </a:solidFill>
-          </a:ln>
-        </p:spPr>
-        <p:txBody>
-          <a:bodyPr rtlCol="0" anchor="ctr"/>
-          <a:lstStyle/>
-          <a:p>
-            <a:pPr algn="ctr"/>
-          </a:p>
-        </p:txBody>
-      </p:sp>
-      <p:sp>
-        <p:nvSpPr>
-          <p:cNvPr id="3" name="Oval 2"/>
-          <p:cNvSpPr/>
-          <p:nvPr/>
-        </p:nvSpPr>
-        <p:spPr>
-          <a:xfrm>
-            <a:off x="259200" y="475200"/>
-            <a:ext cx="849600" cy="849600"/>
-          </a:xfrm>
-          <a:prstGeom prst="ellipse">
-            <a:avLst/>
-          </a:prstGeom>
-          <a:solidFill>
-            <a:srgbClr val="AE7429"/>
-          </a:solidFill>
-          <a:ln>
-            <a:noFill/>
-          </a:ln>
-        </p:spPr>
-        <p:txBody>
-          <a:bodyPr rtlCol="0" anchor="ctr"/>
-          <a:lstStyle/>
-          <a:p>
-            <a:pPr algn="ctr"/>
-          </a:p>
-        </p:txBody>
-      </p:sp>
-      <p:sp>
-        <p:nvSpPr>
-          <p:cNvPr id="4" name="텍스트"/>
-          <p:cNvSpPr txBox="1"/>
-          <p:nvPr/>
-        </p:nvSpPr>
-        <p:spPr>
-          <a:xfrm>
-            <a:off x="259200" y="612000"/>
-            <a:ext cx="849600" cy="576000"/>
+            <a:off x="252000" y="223200"/>
+            <a:ext cx="2016000" cy="133351"/>
           </a:xfrm>
           <a:prstGeom prst="rect">
             <a:avLst/>
@@ -3172,39 +3114,68 @@
           <a:noFill/>
         </p:spPr>
         <p:txBody>
-          <a:bodyPr wrap="square" lIns="0" rIns="0" tIns="0" bIns="0" anchor="ctr">
+          <a:bodyPr wrap="square" lIns="0" rIns="0" tIns="0" bIns="0" anchor="t">
             <a:spAutoFit/>
           </a:bodyPr>
           <a:lstStyle/>
           <a:p>
-            <a:pPr algn="ctr">
+            <a:pPr algn="l">
               <a:lnSpc>
-                <a:spcPts val="6959"/>
+                <a:spcPts val="1015"/>
               </a:lnSpc>
             </a:pPr>
             <a:r>
-              <a:rPr sz="4800" b="1">
+              <a:rPr sz="700" b="1" spc="200">
                 <a:solidFill>
-                  <a:srgbClr val="FFFFFF"/>
+                  <a:srgbClr val="6B7280"/>
                 </a:solidFill>
                 <a:latin typeface="맑은 고딕"/>
                 <a:ea typeface="맑은 고딕"/>
               </a:rPr>
-              <a:t>고</a:t>
-            </a:r>
-          </a:p>
-        </p:txBody>
-      </p:sp>
-      <p:sp>
-        <p:nvSpPr>
-          <p:cNvPr id="5" name="텍스트"/>
+              <a:t>상호명</a:t>
+            </a:r>
+          </a:p>
+        </p:txBody>
+      </p:sp>
+      <p:sp>
+        <p:nvSpPr>
+          <p:cNvPr id="3" name="Oval 2"/>
+          <p:cNvSpPr/>
+          <p:nvPr/>
+        </p:nvSpPr>
+        <p:spPr>
+          <a:xfrm>
+            <a:off x="2955600" y="241200"/>
+            <a:ext cx="64800" cy="64800"/>
+          </a:xfrm>
+          <a:prstGeom prst="ellipse">
+            <a:avLst/>
+          </a:prstGeom>
+          <a:solidFill>
+            <a:srgbClr val="FF6F8E"/>
+          </a:solidFill>
+          <a:ln>
+            <a:noFill/>
+          </a:ln>
+        </p:spPr>
+        <p:txBody>
+          <a:bodyPr rtlCol="0" anchor="ctr"/>
+          <a:lstStyle/>
+          <a:p>
+            <a:pPr algn="ctr"/>
+          </a:p>
+        </p:txBody>
+      </p:sp>
+      <p:sp>
+        <p:nvSpPr>
+          <p:cNvPr id="4" name="텍스트"/>
           <p:cNvSpPr txBox="1"/>
           <p:nvPr/>
         </p:nvSpPr>
         <p:spPr>
           <a:xfrm>
-            <a:off x="1332000" y="223200"/>
-            <a:ext cx="1728000" cy="100800"/>
+            <a:off x="252000" y="676800"/>
+            <a:ext cx="2520000" cy="360000"/>
           </a:xfrm>
           <a:prstGeom prst="rect">
             <a:avLst/>
@@ -3219,32 +3190,32 @@
           <a:p>
             <a:pPr algn="l">
               <a:lnSpc>
-                <a:spcPts val="1087"/>
+                <a:spcPts val="3190"/>
               </a:lnSpc>
             </a:pPr>
             <a:r>
-              <a:rPr sz="750" b="1" spc="150">
+              <a:rPr sz="2200" b="1">
                 <a:solidFill>
-                  <a:srgbClr val="85745D"/>
+                  <a:srgbClr val="12151C"/>
                 </a:solidFill>
                 <a:latin typeface="맑은 고딕"/>
                 <a:ea typeface="맑은 고딕"/>
               </a:rPr>
-              <a:t>상호명</a:t>
-            </a:r>
-          </a:p>
-        </p:txBody>
-      </p:sp>
-      <p:sp>
-        <p:nvSpPr>
-          <p:cNvPr id="6" name="텍스트"/>
+              <a:t>고은채</a:t>
+            </a:r>
+          </a:p>
+        </p:txBody>
+      </p:sp>
+      <p:sp>
+        <p:nvSpPr>
+          <p:cNvPr id="5" name="텍스트"/>
           <p:cNvSpPr txBox="1"/>
           <p:nvPr/>
         </p:nvSpPr>
         <p:spPr>
           <a:xfrm>
-            <a:off x="1332000" y="424800"/>
-            <a:ext cx="1728000" cy="297182"/>
+            <a:off x="252000" y="1080000"/>
+            <a:ext cx="2520000" cy="171451"/>
           </a:xfrm>
           <a:prstGeom prst="rect">
             <a:avLst/>
@@ -3259,22 +3230,43 @@
           <a:p>
             <a:pPr algn="l">
               <a:lnSpc>
-                <a:spcPts val="2610"/>
+                <a:spcPts val="1305"/>
               </a:lnSpc>
             </a:pPr>
             <a:r>
-              <a:rPr sz="1800" b="1" spc="50">
+              <a:rPr sz="900" b="0">
                 <a:solidFill>
-                  <a:srgbClr val="5B3D15"/>
+                  <a:srgbClr val="6B7280"/>
                 </a:solidFill>
                 <a:latin typeface="맑은 고딕"/>
                 <a:ea typeface="맑은 고딕"/>
               </a:rPr>
-              <a:t>고은채</a:t>
-            </a:r>
-          </a:p>
-        </p:txBody>
-      </p:sp>
+              <a:t>인테리어 디자이너</a:t>
+            </a:r>
+          </a:p>
+        </p:txBody>
+      </p:sp>
+      <p:cxnSp>
+        <p:nvCxnSpPr>
+          <p:cNvPr id="6" name="Connector 5"/>
+          <p:cNvCxnSpPr/>
+          <p:nvPr/>
+        </p:nvCxnSpPr>
+        <p:spPr>
+          <a:xfrm>
+            <a:off x="252000" y="1339200"/>
+            <a:ext cx="2736000" cy="0"/>
+          </a:xfrm>
+          <a:prstGeom prst="line">
+            <a:avLst/>
+          </a:prstGeom>
+          <a:ln w="5760">
+            <a:solidFill>
+              <a:srgbClr val="E3E5E9"/>
+            </a:solidFill>
+          </a:ln>
+        </p:spPr>
+      </p:cxnSp>
       <p:sp>
         <p:nvSpPr>
           <p:cNvPr id="7" name="텍스트"/>
@@ -3283,8 +3275,8 @@
         </p:nvSpPr>
         <p:spPr>
           <a:xfrm>
-            <a:off x="1332000" y="705600"/>
-            <a:ext cx="1728000" cy="122400"/>
+            <a:off x="252000" y="1411200"/>
+            <a:ext cx="792000" cy="129541"/>
           </a:xfrm>
           <a:prstGeom prst="rect">
             <a:avLst/>
@@ -3299,61 +3291,32 @@
           <a:p>
             <a:pPr algn="l">
               <a:lnSpc>
-                <a:spcPts val="1232"/>
+                <a:spcPts val="986"/>
               </a:lnSpc>
             </a:pPr>
             <a:r>
-              <a:rPr sz="850" b="1">
+              <a:rPr sz="680" b="0">
                 <a:solidFill>
-                  <a:srgbClr val="9D6825"/>
+                  <a:srgbClr val="12151C"/>
                 </a:solidFill>
                 <a:latin typeface="맑은 고딕"/>
                 <a:ea typeface="맑은 고딕"/>
               </a:rPr>
-              <a:t>인테리어 디자이너</a:t>
-            </a:r>
-          </a:p>
-        </p:txBody>
-      </p:sp>
-      <p:sp>
-        <p:nvSpPr>
-          <p:cNvPr id="8" name="Rectangle 7"/>
-          <p:cNvSpPr/>
+              <a:t>010-1234-5678</a:t>
+            </a:r>
+          </a:p>
+        </p:txBody>
+      </p:sp>
+      <p:sp>
+        <p:nvSpPr>
+          <p:cNvPr id="8" name="텍스트"/>
+          <p:cNvSpPr txBox="1"/>
           <p:nvPr/>
         </p:nvSpPr>
         <p:spPr>
           <a:xfrm>
-            <a:off x="1332000" y="907200"/>
-            <a:ext cx="201600" cy="14400"/>
-          </a:xfrm>
-          <a:prstGeom prst="rect">
-            <a:avLst/>
-          </a:prstGeom>
-          <a:solidFill>
-            <a:srgbClr val="AE7429"/>
-          </a:solidFill>
-          <a:ln>
-            <a:noFill/>
-          </a:ln>
-        </p:spPr>
-        <p:txBody>
-          <a:bodyPr rtlCol="0" anchor="ctr"/>
-          <a:lstStyle/>
-          <a:p>
-            <a:pPr algn="ctr"/>
-          </a:p>
-        </p:txBody>
-      </p:sp>
-      <p:sp>
-        <p:nvSpPr>
-          <p:cNvPr id="9" name="텍스트"/>
-          <p:cNvSpPr txBox="1"/>
-          <p:nvPr/>
-        </p:nvSpPr>
-        <p:spPr>
-          <a:xfrm>
-            <a:off x="1332000" y="1051200"/>
-            <a:ext cx="122400" cy="168911"/>
+            <a:off x="1080000" y="1411200"/>
+            <a:ext cx="900000" cy="129541"/>
           </a:xfrm>
           <a:prstGeom prst="rect">
             <a:avLst/>
@@ -3368,32 +3331,32 @@
           <a:p>
             <a:pPr algn="l">
               <a:lnSpc>
-                <a:spcPts val="1015"/>
+                <a:spcPts val="986"/>
               </a:lnSpc>
             </a:pPr>
             <a:r>
-              <a:rPr sz="700" b="1">
+              <a:rPr sz="680" b="0">
                 <a:solidFill>
-                  <a:srgbClr val="9D6825"/>
+                  <a:srgbClr val="12151C"/>
                 </a:solidFill>
                 <a:latin typeface="맑은 고딕"/>
                 <a:ea typeface="맑은 고딕"/>
               </a:rPr>
-              <a:t>T</a:t>
-            </a:r>
-          </a:p>
-        </p:txBody>
-      </p:sp>
-      <p:sp>
-        <p:nvSpPr>
-          <p:cNvPr id="10" name="텍스트"/>
+              <a:t>name@example.com</a:t>
+            </a:r>
+          </a:p>
+        </p:txBody>
+      </p:sp>
+      <p:sp>
+        <p:nvSpPr>
+          <p:cNvPr id="9" name="텍스트"/>
           <p:cNvSpPr txBox="1"/>
           <p:nvPr/>
         </p:nvSpPr>
         <p:spPr>
           <a:xfrm>
-            <a:off x="1476000" y="1051200"/>
-            <a:ext cx="1584000" cy="168911"/>
+            <a:off x="2052000" y="1411200"/>
+            <a:ext cx="972000" cy="129541"/>
           </a:xfrm>
           <a:prstGeom prst="rect">
             <a:avLst/>
@@ -3408,32 +3371,32 @@
           <a:p>
             <a:pPr algn="l">
               <a:lnSpc>
-                <a:spcPts val="1015"/>
+                <a:spcPts val="986"/>
               </a:lnSpc>
             </a:pPr>
             <a:r>
-              <a:rPr sz="700" b="0">
+              <a:rPr sz="680" b="0">
                 <a:solidFill>
-                  <a:srgbClr val="5B3D15"/>
+                  <a:srgbClr val="12151C"/>
                 </a:solidFill>
                 <a:latin typeface="맑은 고딕"/>
                 <a:ea typeface="맑은 고딕"/>
               </a:rPr>
-              <a:t>010-1234-5678</a:t>
-            </a:r>
-          </a:p>
-        </p:txBody>
-      </p:sp>
-      <p:sp>
-        <p:nvSpPr>
-          <p:cNvPr id="11" name="텍스트"/>
+              <a:t>주소를 입력해 주세요</a:t>
+            </a:r>
+          </a:p>
+        </p:txBody>
+      </p:sp>
+      <p:sp>
+        <p:nvSpPr>
+          <p:cNvPr id="10" name="텍스트"/>
           <p:cNvSpPr txBox="1"/>
           <p:nvPr/>
         </p:nvSpPr>
         <p:spPr>
           <a:xfrm>
-            <a:off x="1332000" y="1220111"/>
-            <a:ext cx="122400" cy="168911"/>
+            <a:off x="252000" y="1526400"/>
+            <a:ext cx="216000" cy="95251"/>
           </a:xfrm>
           <a:prstGeom prst="rect">
             <a:avLst/>
@@ -3448,32 +3411,32 @@
           <a:p>
             <a:pPr algn="l">
               <a:lnSpc>
-                <a:spcPts val="1015"/>
+                <a:spcPts val="725"/>
               </a:lnSpc>
             </a:pPr>
             <a:r>
-              <a:rPr sz="700" b="1">
+              <a:rPr sz="500" b="1" spc="120">
                 <a:solidFill>
-                  <a:srgbClr val="9D6825"/>
+                  <a:srgbClr val="6B7280"/>
                 </a:solidFill>
                 <a:latin typeface="맑은 고딕"/>
                 <a:ea typeface="맑은 고딕"/>
               </a:rPr>
-              <a:t>E</a:t>
-            </a:r>
-          </a:p>
-        </p:txBody>
-      </p:sp>
-      <p:sp>
-        <p:nvSpPr>
-          <p:cNvPr id="12" name="텍스트"/>
+              <a:t>TEL</a:t>
+            </a:r>
+          </a:p>
+        </p:txBody>
+      </p:sp>
+      <p:sp>
+        <p:nvSpPr>
+          <p:cNvPr id="11" name="텍스트"/>
           <p:cNvSpPr txBox="1"/>
           <p:nvPr/>
         </p:nvSpPr>
         <p:spPr>
           <a:xfrm>
-            <a:off x="1476000" y="1220111"/>
-            <a:ext cx="1584000" cy="168911"/>
+            <a:off x="1080000" y="1526400"/>
+            <a:ext cx="216000" cy="95251"/>
           </a:xfrm>
           <a:prstGeom prst="rect">
             <a:avLst/>
@@ -3488,32 +3451,32 @@
           <a:p>
             <a:pPr algn="l">
               <a:lnSpc>
-                <a:spcPts val="1015"/>
+                <a:spcPts val="725"/>
               </a:lnSpc>
             </a:pPr>
             <a:r>
-              <a:rPr sz="700" b="0">
+              <a:rPr sz="500" b="1" spc="120">
                 <a:solidFill>
-                  <a:srgbClr val="5B3D15"/>
+                  <a:srgbClr val="6B7280"/>
                 </a:solidFill>
                 <a:latin typeface="맑은 고딕"/>
                 <a:ea typeface="맑은 고딕"/>
               </a:rPr>
-              <a:t>name@example.com</a:t>
-            </a:r>
-          </a:p>
-        </p:txBody>
-      </p:sp>
-      <p:sp>
-        <p:nvSpPr>
-          <p:cNvPr id="13" name="텍스트"/>
+              <a:t>MAIL</a:t>
+            </a:r>
+          </a:p>
+        </p:txBody>
+      </p:sp>
+      <p:sp>
+        <p:nvSpPr>
+          <p:cNvPr id="12" name="텍스트"/>
           <p:cNvSpPr txBox="1"/>
           <p:nvPr/>
         </p:nvSpPr>
         <p:spPr>
           <a:xfrm>
-            <a:off x="1332000" y="1389022"/>
-            <a:ext cx="122400" cy="168911"/>
+            <a:off x="2052000" y="1526400"/>
+            <a:ext cx="216000" cy="95251"/>
           </a:xfrm>
           <a:prstGeom prst="rect">
             <a:avLst/>
@@ -3528,58 +3491,18 @@
           <a:p>
             <a:pPr algn="l">
               <a:lnSpc>
-                <a:spcPts val="1015"/>
+                <a:spcPts val="725"/>
               </a:lnSpc>
             </a:pPr>
             <a:r>
-              <a:rPr sz="700" b="1">
+              <a:rPr sz="500" b="1" spc="120">
                 <a:solidFill>
-                  <a:srgbClr val="9D6825"/>
+                  <a:srgbClr val="6B7280"/>
                 </a:solidFill>
                 <a:latin typeface="맑은 고딕"/>
                 <a:ea typeface="맑은 고딕"/>
               </a:rPr>
-              <a:t>A</a:t>
-            </a:r>
-          </a:p>
-        </p:txBody>
-      </p:sp>
-      <p:sp>
-        <p:nvSpPr>
-          <p:cNvPr id="14" name="텍스트"/>
-          <p:cNvSpPr txBox="1"/>
-          <p:nvPr/>
-        </p:nvSpPr>
-        <p:spPr>
-          <a:xfrm>
-            <a:off x="1476000" y="1389022"/>
-            <a:ext cx="1584000" cy="168911"/>
-          </a:xfrm>
-          <a:prstGeom prst="rect">
-            <a:avLst/>
-          </a:prstGeom>
-          <a:noFill/>
-        </p:spPr>
-        <p:txBody>
-          <a:bodyPr wrap="square" lIns="0" rIns="0" tIns="0" bIns="0" anchor="t">
-            <a:spAutoFit/>
-          </a:bodyPr>
-          <a:lstStyle/>
-          <a:p>
-            <a:pPr algn="l">
-              <a:lnSpc>
-                <a:spcPts val="1015"/>
-              </a:lnSpc>
-            </a:pPr>
-            <a:r>
-              <a:rPr sz="700" b="0">
-                <a:solidFill>
-                  <a:srgbClr val="5B3D15"/>
-                </a:solidFill>
-                <a:latin typeface="맑은 고딕"/>
-                <a:ea typeface="맑은 고딕"/>
-              </a:rPr>
-              <a:t>주소를 입력해 주세요</a:t>
+              <a:t>ADDR</a:t>
             </a:r>
           </a:p>
         </p:txBody>
@@ -3598,7 +3521,7 @@
     <p:bg>
       <p:bgPr>
         <a:solidFill>
-          <a:srgbClr val="FFFFFF"/>
+          <a:srgbClr val="FFF1F4"/>
         </a:solidFill>
         <a:effectLst/>
       </p:bgPr>
@@ -3612,20 +3535,20 @@
       <p:grpSpPr/>
       <p:sp>
         <p:nvSpPr>
-          <p:cNvPr id="2" name="Oval 1"/>
+          <p:cNvPr id="2" name="Rectangle 1"/>
           <p:cNvSpPr/>
           <p:nvPr/>
         </p:nvSpPr>
         <p:spPr>
           <a:xfrm>
-            <a:off x="1414080" y="171360"/>
-            <a:ext cx="411840" cy="696960"/>
+            <a:off x="2088000" y="0"/>
+            <a:ext cx="1152000" cy="1800000"/>
           </a:xfrm>
-          <a:prstGeom prst="ellipse">
+          <a:prstGeom prst="rect">
             <a:avLst/>
           </a:prstGeom>
           <a:solidFill>
-            <a:srgbClr val="AE7429"/>
+            <a:srgbClr val="FF6F8E"/>
           </a:solidFill>
           <a:ln>
             <a:noFill/>
@@ -3646,18 +3569,18 @@
           <p:nvPr/>
         </p:nvSpPr>
         <p:spPr>
-          <a:xfrm rot="4320000">
-            <a:off x="1775634" y="434044"/>
-            <a:ext cx="411840" cy="696960"/>
+          <a:xfrm>
+            <a:off x="2397600" y="633600"/>
+            <a:ext cx="532800" cy="532800"/>
           </a:xfrm>
           <a:prstGeom prst="ellipse">
             <a:avLst/>
           </a:prstGeom>
-          <a:solidFill>
-            <a:srgbClr val="AE7429"/>
-          </a:solidFill>
-          <a:ln>
-            <a:noFill/>
+          <a:noFill/>
+          <a:ln w="10800">
+            <a:solidFill>
+              <a:srgbClr val="12151C"/>
+            </a:solidFill>
           </a:ln>
         </p:spPr>
         <p:txBody>
@@ -3670,161 +3593,14 @@
       </p:sp>
       <p:sp>
         <p:nvSpPr>
-          <p:cNvPr id="4" name="Oval 3"/>
-          <p:cNvSpPr/>
-          <p:nvPr/>
-        </p:nvSpPr>
-        <p:spPr>
-          <a:xfrm rot="8640000">
-            <a:off x="1637532" y="859076"/>
-            <a:ext cx="411840" cy="696960"/>
-          </a:xfrm>
-          <a:prstGeom prst="ellipse">
-            <a:avLst/>
-          </a:prstGeom>
-          <a:solidFill>
-            <a:srgbClr val="AE7429"/>
-          </a:solidFill>
-          <a:ln>
-            <a:noFill/>
-          </a:ln>
-        </p:spPr>
-        <p:txBody>
-          <a:bodyPr rtlCol="0" anchor="ctr"/>
-          <a:lstStyle/>
-          <a:p>
-            <a:pPr algn="ctr"/>
-          </a:p>
-        </p:txBody>
-      </p:sp>
-      <p:sp>
-        <p:nvSpPr>
-          <p:cNvPr id="5" name="Oval 4"/>
-          <p:cNvSpPr/>
-          <p:nvPr/>
-        </p:nvSpPr>
-        <p:spPr>
-          <a:xfrm rot="12960000">
-            <a:off x="1190628" y="859076"/>
-            <a:ext cx="411840" cy="696960"/>
-          </a:xfrm>
-          <a:prstGeom prst="ellipse">
-            <a:avLst/>
-          </a:prstGeom>
-          <a:solidFill>
-            <a:srgbClr val="AE7429"/>
-          </a:solidFill>
-          <a:ln>
-            <a:noFill/>
-          </a:ln>
-        </p:spPr>
-        <p:txBody>
-          <a:bodyPr rtlCol="0" anchor="ctr"/>
-          <a:lstStyle/>
-          <a:p>
-            <a:pPr algn="ctr"/>
-          </a:p>
-        </p:txBody>
-      </p:sp>
-      <p:sp>
-        <p:nvSpPr>
-          <p:cNvPr id="6" name="Oval 5"/>
-          <p:cNvSpPr/>
-          <p:nvPr/>
-        </p:nvSpPr>
-        <p:spPr>
-          <a:xfrm rot="17280000">
-            <a:off x="1052526" y="434044"/>
-            <a:ext cx="411840" cy="696960"/>
-          </a:xfrm>
-          <a:prstGeom prst="ellipse">
-            <a:avLst/>
-          </a:prstGeom>
-          <a:solidFill>
-            <a:srgbClr val="AE7429"/>
-          </a:solidFill>
-          <a:ln>
-            <a:noFill/>
-          </a:ln>
-        </p:spPr>
-        <p:txBody>
-          <a:bodyPr rtlCol="0" anchor="ctr"/>
-          <a:lstStyle/>
-          <a:p>
-            <a:pPr algn="ctr"/>
-          </a:p>
-        </p:txBody>
-      </p:sp>
-      <p:sp>
-        <p:nvSpPr>
-          <p:cNvPr id="7" name="Oval 6"/>
-          <p:cNvSpPr/>
+          <p:cNvPr id="4" name="텍스트"/>
+          <p:cNvSpPr txBox="1"/>
           <p:nvPr/>
         </p:nvSpPr>
         <p:spPr>
           <a:xfrm>
-            <a:off x="1445760" y="725760"/>
-            <a:ext cx="348480" cy="348480"/>
-          </a:xfrm>
-          <a:prstGeom prst="ellipse">
-            <a:avLst/>
-          </a:prstGeom>
-          <a:solidFill>
-            <a:srgbClr val="F5E3CC"/>
-          </a:solidFill>
-          <a:ln>
-            <a:noFill/>
-          </a:ln>
-        </p:spPr>
-        <p:txBody>
-          <a:bodyPr rtlCol="0" anchor="ctr"/>
-          <a:lstStyle/>
-          <a:p>
-            <a:pPr algn="ctr"/>
-          </a:p>
-        </p:txBody>
-      </p:sp>
-      <p:sp>
-        <p:nvSpPr>
-          <p:cNvPr id="8" name="Rectangle 7"/>
-          <p:cNvSpPr/>
-          <p:nvPr/>
-        </p:nvSpPr>
-        <p:spPr>
-          <a:xfrm>
-            <a:off x="0" y="0"/>
-            <a:ext cx="3240000" cy="1800000"/>
-          </a:xfrm>
-          <a:prstGeom prst="rect">
-            <a:avLst/>
-          </a:prstGeom>
-          <a:solidFill>
-            <a:srgbClr val="FFFFFF">
-              <a:alpha val="90000"/>
-            </a:srgbClr>
-          </a:solidFill>
-          <a:ln>
-            <a:noFill/>
-          </a:ln>
-        </p:spPr>
-        <p:txBody>
-          <a:bodyPr rtlCol="0" anchor="ctr"/>
-          <a:lstStyle/>
-          <a:p>
-            <a:pPr algn="ctr"/>
-          </a:p>
-        </p:txBody>
-      </p:sp>
-      <p:sp>
-        <p:nvSpPr>
-          <p:cNvPr id="9" name="텍스트"/>
-          <p:cNvSpPr txBox="1"/>
-          <p:nvPr/>
-        </p:nvSpPr>
-        <p:spPr>
-          <a:xfrm>
-            <a:off x="396000" y="612000"/>
-            <a:ext cx="2448000" cy="432000"/>
+            <a:off x="2304000" y="684000"/>
+            <a:ext cx="720000" cy="432000"/>
           </a:xfrm>
           <a:prstGeom prst="rect">
             <a:avLst/>
@@ -3839,61 +3615,32 @@
           <a:p>
             <a:pPr algn="ctr">
               <a:lnSpc>
-                <a:spcPts val="1739"/>
+                <a:spcPts val="4350"/>
               </a:lnSpc>
             </a:pPr>
             <a:r>
-              <a:rPr sz="1200" b="1">
+              <a:rPr sz="3000" b="1">
                 <a:solidFill>
-                  <a:srgbClr val="5B3D15"/>
+                  <a:srgbClr val="12151C"/>
                 </a:solidFill>
                 <a:latin typeface="맑은 고딕"/>
                 <a:ea typeface="맑은 고딕"/>
               </a:rPr>
-              <a:t>이웃의 안부를 먼저 묻는 가게</a:t>
-            </a:r>
-          </a:p>
-        </p:txBody>
-      </p:sp>
-      <p:sp>
-        <p:nvSpPr>
-          <p:cNvPr id="10" name="Rectangle 9"/>
-          <p:cNvSpPr/>
+              <a:t>상</a:t>
+            </a:r>
+          </a:p>
+        </p:txBody>
+      </p:sp>
+      <p:sp>
+        <p:nvSpPr>
+          <p:cNvPr id="5" name="텍스트"/>
+          <p:cNvSpPr txBox="1"/>
           <p:nvPr/>
         </p:nvSpPr>
         <p:spPr>
           <a:xfrm>
-            <a:off x="1512000" y="1173600"/>
-            <a:ext cx="216000" cy="10800"/>
-          </a:xfrm>
-          <a:prstGeom prst="rect">
-            <a:avLst/>
-          </a:prstGeom>
-          <a:solidFill>
-            <a:srgbClr val="AE7429"/>
-          </a:solidFill>
-          <a:ln>
-            <a:noFill/>
-          </a:ln>
-        </p:spPr>
-        <p:txBody>
-          <a:bodyPr rtlCol="0" anchor="ctr"/>
-          <a:lstStyle/>
-          <a:p>
-            <a:pPr algn="ctr"/>
-          </a:p>
-        </p:txBody>
-      </p:sp>
-      <p:sp>
-        <p:nvSpPr>
-          <p:cNvPr id="11" name="텍스트"/>
-          <p:cNvSpPr txBox="1"/>
-          <p:nvPr/>
-        </p:nvSpPr>
-        <p:spPr>
-          <a:xfrm>
-            <a:off x="360000" y="1288800"/>
-            <a:ext cx="2520000" cy="108000"/>
+            <a:off x="252000" y="540000"/>
+            <a:ext cx="1620000" cy="720000"/>
           </a:xfrm>
           <a:prstGeom prst="rect">
             <a:avLst/>
@@ -3906,15 +3653,72 @@
           </a:bodyPr>
           <a:lstStyle/>
           <a:p>
-            <a:pPr algn="ctr">
+            <a:pPr algn="l">
               <a:lnSpc>
-                <a:spcPts val="1087"/>
+                <a:spcPts val="1739"/>
               </a:lnSpc>
             </a:pPr>
             <a:r>
-              <a:rPr sz="750" b="1" spc="300">
+              <a:rPr sz="1200" b="1">
                 <a:solidFill>
-                  <a:srgbClr val="85745D"/>
+                  <a:srgbClr val="12151C"/>
+                </a:solidFill>
+                <a:latin typeface="맑은 고딕"/>
+                <a:ea typeface="맑은 고딕"/>
+              </a:rPr>
+              <a:t>이웃의 안부를</a:t>
+            </a:r>
+          </a:p>
+          <a:p>
+            <a:pPr algn="l">
+              <a:lnSpc>
+                <a:spcPts val="1739"/>
+              </a:lnSpc>
+            </a:pPr>
+            <a:r>
+              <a:rPr sz="1200" b="1">
+                <a:solidFill>
+                  <a:srgbClr val="12151C"/>
+                </a:solidFill>
+                <a:latin typeface="맑은 고딕"/>
+                <a:ea typeface="맑은 고딕"/>
+              </a:rPr>
+              <a:t>먼저 묻는 가게</a:t>
+            </a:r>
+          </a:p>
+        </p:txBody>
+      </p:sp>
+      <p:sp>
+        <p:nvSpPr>
+          <p:cNvPr id="6" name="텍스트"/>
+          <p:cNvSpPr txBox="1"/>
+          <p:nvPr/>
+        </p:nvSpPr>
+        <p:spPr>
+          <a:xfrm>
+            <a:off x="252000" y="1512000"/>
+            <a:ext cx="1584000" cy="123826"/>
+          </a:xfrm>
+          <a:prstGeom prst="rect">
+            <a:avLst/>
+          </a:prstGeom>
+          <a:noFill/>
+        </p:spPr>
+        <p:txBody>
+          <a:bodyPr wrap="square" lIns="0" rIns="0" tIns="0" bIns="0" anchor="t">
+            <a:spAutoFit/>
+          </a:bodyPr>
+          <a:lstStyle/>
+          <a:p>
+            <a:pPr algn="l">
+              <a:lnSpc>
+                <a:spcPts val="942"/>
+              </a:lnSpc>
+            </a:pPr>
+            <a:r>
+              <a:rPr sz="650" b="1" spc="200">
+                <a:solidFill>
+                  <a:srgbClr val="6C3747"/>
                 </a:solidFill>
                 <a:latin typeface="맑은 고딕"/>
                 <a:ea typeface="맑은 고딕"/>

--- a/public/fun/cards/life/life-25.pptx
+++ b/public/fun/cards/life/life-25.pptx
@@ -3099,14 +3099,72 @@
       <p:grpSpPr/>
       <p:sp>
         <p:nvSpPr>
-          <p:cNvPr id="2" name="텍스트"/>
+          <p:cNvPr id="2" name="Rectangle 1"/>
+          <p:cNvSpPr/>
+          <p:nvPr/>
+        </p:nvSpPr>
+        <p:spPr>
+          <a:xfrm>
+            <a:off x="93600" y="93600"/>
+            <a:ext cx="3052800" cy="1612800"/>
+          </a:xfrm>
+          <a:prstGeom prst="rect">
+            <a:avLst/>
+          </a:prstGeom>
+          <a:noFill/>
+          <a:ln w="3600">
+            <a:solidFill>
+              <a:srgbClr val="E3E5E9"/>
+            </a:solidFill>
+          </a:ln>
+        </p:spPr>
+        <p:txBody>
+          <a:bodyPr rtlCol="0" anchor="ctr"/>
+          <a:lstStyle/>
+          <a:p>
+            <a:pPr algn="ctr"/>
+          </a:p>
+        </p:txBody>
+      </p:sp>
+      <p:sp>
+        <p:nvSpPr>
+          <p:cNvPr id="3" name="Rectangle 2"/>
+          <p:cNvSpPr/>
+          <p:nvPr/>
+        </p:nvSpPr>
+        <p:spPr>
+          <a:xfrm>
+            <a:off x="252000" y="252000"/>
+            <a:ext cx="79200" cy="79200"/>
+          </a:xfrm>
+          <a:prstGeom prst="rect">
+            <a:avLst/>
+          </a:prstGeom>
+          <a:solidFill>
+            <a:srgbClr val="FF6F8E"/>
+          </a:solidFill>
+          <a:ln>
+            <a:noFill/>
+          </a:ln>
+        </p:spPr>
+        <p:txBody>
+          <a:bodyPr rtlCol="0" anchor="ctr"/>
+          <a:lstStyle/>
+          <a:p>
+            <a:pPr algn="ctr"/>
+          </a:p>
+        </p:txBody>
+      </p:sp>
+      <p:sp>
+        <p:nvSpPr>
+          <p:cNvPr id="4" name="텍스트"/>
           <p:cNvSpPr txBox="1"/>
           <p:nvPr/>
         </p:nvSpPr>
         <p:spPr>
           <a:xfrm>
-            <a:off x="252000" y="223200"/>
-            <a:ext cx="2016000" cy="133351"/>
+            <a:off x="396000" y="259200"/>
+            <a:ext cx="1512000" cy="123826"/>
           </a:xfrm>
           <a:prstGeom prst="rect">
             <a:avLst/>
@@ -3121,11 +3179,11 @@
           <a:p>
             <a:pPr algn="l">
               <a:lnSpc>
-                <a:spcPts val="1015"/>
+                <a:spcPts val="942"/>
               </a:lnSpc>
             </a:pPr>
             <a:r>
-              <a:rPr sz="700" b="1" spc="200">
+              <a:rPr sz="650" b="1" spc="220">
                 <a:solidFill>
                   <a:srgbClr val="6B7280"/>
                 </a:solidFill>
@@ -3137,45 +3195,37 @@
           </a:p>
         </p:txBody>
       </p:sp>
-      <p:sp>
-        <p:nvSpPr>
-          <p:cNvPr id="3" name="Oval 2"/>
-          <p:cNvSpPr/>
-          <p:nvPr/>
-        </p:nvSpPr>
+      <p:cxnSp>
+        <p:nvCxnSpPr>
+          <p:cNvPr id="5" name="Connector 4"/>
+          <p:cNvCxnSpPr/>
+          <p:nvPr/>
+        </p:nvCxnSpPr>
         <p:spPr>
           <a:xfrm>
-            <a:off x="2955600" y="241200"/>
-            <a:ext cx="64800" cy="64800"/>
-          </a:xfrm>
-          <a:prstGeom prst="ellipse">
-            <a:avLst/>
-          </a:prstGeom>
-          <a:solidFill>
-            <a:srgbClr val="FF6F8E"/>
-          </a:solidFill>
-          <a:ln>
-            <a:noFill/>
+            <a:off x="252000" y="446400"/>
+            <a:ext cx="2736000" cy="0"/>
+          </a:xfrm>
+          <a:prstGeom prst="line">
+            <a:avLst/>
+          </a:prstGeom>
+          <a:ln w="3600">
+            <a:solidFill>
+              <a:srgbClr val="E3E5E9"/>
+            </a:solidFill>
           </a:ln>
         </p:spPr>
-        <p:txBody>
-          <a:bodyPr rtlCol="0" anchor="ctr"/>
-          <a:lstStyle/>
-          <a:p>
-            <a:pPr algn="ctr"/>
-          </a:p>
-        </p:txBody>
-      </p:sp>
-      <p:sp>
-        <p:nvSpPr>
-          <p:cNvPr id="4" name="텍스트"/>
+      </p:cxnSp>
+      <p:sp>
+        <p:nvSpPr>
+          <p:cNvPr id="6" name="텍스트"/>
           <p:cNvSpPr txBox="1"/>
           <p:nvPr/>
         </p:nvSpPr>
         <p:spPr>
           <a:xfrm>
-            <a:off x="252000" y="676800"/>
-            <a:ext cx="2520000" cy="360000"/>
+            <a:off x="252000" y="964800"/>
+            <a:ext cx="1800000" cy="237600"/>
           </a:xfrm>
           <a:prstGeom prst="rect">
             <a:avLst/>
@@ -3190,11 +3240,11 @@
           <a:p>
             <a:pPr algn="l">
               <a:lnSpc>
-                <a:spcPts val="3190"/>
+                <a:spcPts val="1957"/>
               </a:lnSpc>
             </a:pPr>
             <a:r>
-              <a:rPr sz="2200" b="1">
+              <a:rPr sz="1350" b="1" spc="120">
                 <a:solidFill>
                   <a:srgbClr val="12151C"/>
                 </a:solidFill>
@@ -3208,14 +3258,14 @@
       </p:sp>
       <p:sp>
         <p:nvSpPr>
-          <p:cNvPr id="5" name="텍스트"/>
+          <p:cNvPr id="7" name="텍스트"/>
           <p:cNvSpPr txBox="1"/>
           <p:nvPr/>
         </p:nvSpPr>
         <p:spPr>
           <a:xfrm>
-            <a:off x="252000" y="1080000"/>
-            <a:ext cx="2520000" cy="171451"/>
+            <a:off x="252000" y="1216800"/>
+            <a:ext cx="1800000" cy="133351"/>
           </a:xfrm>
           <a:prstGeom prst="rect">
             <a:avLst/>
@@ -3230,11 +3280,11 @@
           <a:p>
             <a:pPr algn="l">
               <a:lnSpc>
-                <a:spcPts val="1305"/>
+                <a:spcPts val="1015"/>
               </a:lnSpc>
             </a:pPr>
             <a:r>
-              <a:rPr sz="900" b="0">
+              <a:rPr sz="700" b="0" spc="60">
                 <a:solidFill>
                   <a:srgbClr val="6B7280"/>
                 </a:solidFill>
@@ -3248,19 +3298,19 @@
       </p:sp>
       <p:cxnSp>
         <p:nvCxnSpPr>
-          <p:cNvPr id="6" name="Connector 5"/>
+          <p:cNvPr id="8" name="Connector 7"/>
           <p:cNvCxnSpPr/>
           <p:nvPr/>
         </p:nvCxnSpPr>
         <p:spPr>
           <a:xfrm>
-            <a:off x="252000" y="1339200"/>
-            <a:ext cx="2736000" cy="0"/>
+            <a:off x="1872000" y="943200"/>
+            <a:ext cx="0" cy="604800"/>
           </a:xfrm>
           <a:prstGeom prst="line">
             <a:avLst/>
           </a:prstGeom>
-          <a:ln w="5760">
+          <a:ln w="3600">
             <a:solidFill>
               <a:srgbClr val="E3E5E9"/>
             </a:solidFill>
@@ -3269,14 +3319,14 @@
       </p:cxnSp>
       <p:sp>
         <p:nvSpPr>
-          <p:cNvPr id="7" name="텍스트"/>
+          <p:cNvPr id="9" name="텍스트"/>
           <p:cNvSpPr txBox="1"/>
           <p:nvPr/>
         </p:nvSpPr>
         <p:spPr>
           <a:xfrm>
-            <a:off x="252000" y="1411200"/>
-            <a:ext cx="792000" cy="129541"/>
+            <a:off x="2016000" y="1033200"/>
+            <a:ext cx="302400" cy="91441"/>
           </a:xfrm>
           <a:prstGeom prst="rect">
             <a:avLst/>
@@ -3291,11 +3341,51 @@
           <a:p>
             <a:pPr algn="l">
               <a:lnSpc>
-                <a:spcPts val="986"/>
+                <a:spcPts val="696"/>
               </a:lnSpc>
             </a:pPr>
             <a:r>
-              <a:rPr sz="680" b="0">
+              <a:rPr sz="480" b="1" spc="140">
+                <a:solidFill>
+                  <a:srgbClr val="6B7280"/>
+                </a:solidFill>
+                <a:latin typeface="맑은 고딕"/>
+                <a:ea typeface="맑은 고딕"/>
+              </a:rPr>
+              <a:t>TEL</a:t>
+            </a:r>
+          </a:p>
+        </p:txBody>
+      </p:sp>
+      <p:sp>
+        <p:nvSpPr>
+          <p:cNvPr id="10" name="텍스트"/>
+          <p:cNvSpPr txBox="1"/>
+          <p:nvPr/>
+        </p:nvSpPr>
+        <p:spPr>
+          <a:xfrm>
+            <a:off x="2318400" y="1022400"/>
+            <a:ext cx="972000" cy="123826"/>
+          </a:xfrm>
+          <a:prstGeom prst="rect">
+            <a:avLst/>
+          </a:prstGeom>
+          <a:noFill/>
+        </p:spPr>
+        <p:txBody>
+          <a:bodyPr wrap="square" lIns="0" rIns="0" tIns="0" bIns="0" anchor="t">
+            <a:spAutoFit/>
+          </a:bodyPr>
+          <a:lstStyle/>
+          <a:p>
+            <a:pPr algn="l">
+              <a:lnSpc>
+                <a:spcPts val="942"/>
+              </a:lnSpc>
+            </a:pPr>
+            <a:r>
+              <a:rPr sz="650" b="0">
                 <a:solidFill>
                   <a:srgbClr val="12151C"/>
                 </a:solidFill>
@@ -3309,14 +3399,14 @@
       </p:sp>
       <p:sp>
         <p:nvSpPr>
-          <p:cNvPr id="8" name="텍스트"/>
+          <p:cNvPr id="11" name="텍스트"/>
           <p:cNvSpPr txBox="1"/>
           <p:nvPr/>
         </p:nvSpPr>
         <p:spPr>
           <a:xfrm>
-            <a:off x="1080000" y="1411200"/>
-            <a:ext cx="900000" cy="129541"/>
+            <a:off x="2016000" y="1177200"/>
+            <a:ext cx="302400" cy="91441"/>
           </a:xfrm>
           <a:prstGeom prst="rect">
             <a:avLst/>
@@ -3331,11 +3421,51 @@
           <a:p>
             <a:pPr algn="l">
               <a:lnSpc>
-                <a:spcPts val="986"/>
+                <a:spcPts val="696"/>
               </a:lnSpc>
             </a:pPr>
             <a:r>
-              <a:rPr sz="680" b="0">
+              <a:rPr sz="480" b="1" spc="140">
+                <a:solidFill>
+                  <a:srgbClr val="6B7280"/>
+                </a:solidFill>
+                <a:latin typeface="맑은 고딕"/>
+                <a:ea typeface="맑은 고딕"/>
+              </a:rPr>
+              <a:t>MAIL</a:t>
+            </a:r>
+          </a:p>
+        </p:txBody>
+      </p:sp>
+      <p:sp>
+        <p:nvSpPr>
+          <p:cNvPr id="12" name="텍스트"/>
+          <p:cNvSpPr txBox="1"/>
+          <p:nvPr/>
+        </p:nvSpPr>
+        <p:spPr>
+          <a:xfrm>
+            <a:off x="2318400" y="1166400"/>
+            <a:ext cx="972000" cy="123826"/>
+          </a:xfrm>
+          <a:prstGeom prst="rect">
+            <a:avLst/>
+          </a:prstGeom>
+          <a:noFill/>
+        </p:spPr>
+        <p:txBody>
+          <a:bodyPr wrap="square" lIns="0" rIns="0" tIns="0" bIns="0" anchor="t">
+            <a:spAutoFit/>
+          </a:bodyPr>
+          <a:lstStyle/>
+          <a:p>
+            <a:pPr algn="l">
+              <a:lnSpc>
+                <a:spcPts val="942"/>
+              </a:lnSpc>
+            </a:pPr>
+            <a:r>
+              <a:rPr sz="650" b="0">
                 <a:solidFill>
                   <a:srgbClr val="12151C"/>
                 </a:solidFill>
@@ -3349,14 +3479,14 @@
       </p:sp>
       <p:sp>
         <p:nvSpPr>
-          <p:cNvPr id="9" name="텍스트"/>
+          <p:cNvPr id="13" name="텍스트"/>
           <p:cNvSpPr txBox="1"/>
           <p:nvPr/>
         </p:nvSpPr>
         <p:spPr>
           <a:xfrm>
-            <a:off x="2052000" y="1411200"/>
-            <a:ext cx="972000" cy="129541"/>
+            <a:off x="2016000" y="1321200"/>
+            <a:ext cx="302400" cy="91441"/>
           </a:xfrm>
           <a:prstGeom prst="rect">
             <a:avLst/>
@@ -3371,11 +3501,51 @@
           <a:p>
             <a:pPr algn="l">
               <a:lnSpc>
-                <a:spcPts val="986"/>
+                <a:spcPts val="696"/>
               </a:lnSpc>
             </a:pPr>
             <a:r>
-              <a:rPr sz="680" b="0">
+              <a:rPr sz="480" b="1" spc="140">
+                <a:solidFill>
+                  <a:srgbClr val="6B7280"/>
+                </a:solidFill>
+                <a:latin typeface="맑은 고딕"/>
+                <a:ea typeface="맑은 고딕"/>
+              </a:rPr>
+              <a:t>ADDR</a:t>
+            </a:r>
+          </a:p>
+        </p:txBody>
+      </p:sp>
+      <p:sp>
+        <p:nvSpPr>
+          <p:cNvPr id="14" name="텍스트"/>
+          <p:cNvSpPr txBox="1"/>
+          <p:nvPr/>
+        </p:nvSpPr>
+        <p:spPr>
+          <a:xfrm>
+            <a:off x="2318400" y="1310400"/>
+            <a:ext cx="972000" cy="123826"/>
+          </a:xfrm>
+          <a:prstGeom prst="rect">
+            <a:avLst/>
+          </a:prstGeom>
+          <a:noFill/>
+        </p:spPr>
+        <p:txBody>
+          <a:bodyPr wrap="square" lIns="0" rIns="0" tIns="0" bIns="0" anchor="t">
+            <a:spAutoFit/>
+          </a:bodyPr>
+          <a:lstStyle/>
+          <a:p>
+            <a:pPr algn="l">
+              <a:lnSpc>
+                <a:spcPts val="942"/>
+              </a:lnSpc>
+            </a:pPr>
+            <a:r>
+              <a:rPr sz="650" b="0">
                 <a:solidFill>
                   <a:srgbClr val="12151C"/>
                 </a:solidFill>
@@ -3383,126 +3553,6 @@
                 <a:ea typeface="맑은 고딕"/>
               </a:rPr>
               <a:t>주소를 입력해 주세요</a:t>
-            </a:r>
-          </a:p>
-        </p:txBody>
-      </p:sp>
-      <p:sp>
-        <p:nvSpPr>
-          <p:cNvPr id="10" name="텍스트"/>
-          <p:cNvSpPr txBox="1"/>
-          <p:nvPr/>
-        </p:nvSpPr>
-        <p:spPr>
-          <a:xfrm>
-            <a:off x="252000" y="1526400"/>
-            <a:ext cx="216000" cy="95251"/>
-          </a:xfrm>
-          <a:prstGeom prst="rect">
-            <a:avLst/>
-          </a:prstGeom>
-          <a:noFill/>
-        </p:spPr>
-        <p:txBody>
-          <a:bodyPr wrap="square" lIns="0" rIns="0" tIns="0" bIns="0" anchor="t">
-            <a:spAutoFit/>
-          </a:bodyPr>
-          <a:lstStyle/>
-          <a:p>
-            <a:pPr algn="l">
-              <a:lnSpc>
-                <a:spcPts val="725"/>
-              </a:lnSpc>
-            </a:pPr>
-            <a:r>
-              <a:rPr sz="500" b="1" spc="120">
-                <a:solidFill>
-                  <a:srgbClr val="6B7280"/>
-                </a:solidFill>
-                <a:latin typeface="맑은 고딕"/>
-                <a:ea typeface="맑은 고딕"/>
-              </a:rPr>
-              <a:t>TEL</a:t>
-            </a:r>
-          </a:p>
-        </p:txBody>
-      </p:sp>
-      <p:sp>
-        <p:nvSpPr>
-          <p:cNvPr id="11" name="텍스트"/>
-          <p:cNvSpPr txBox="1"/>
-          <p:nvPr/>
-        </p:nvSpPr>
-        <p:spPr>
-          <a:xfrm>
-            <a:off x="1080000" y="1526400"/>
-            <a:ext cx="216000" cy="95251"/>
-          </a:xfrm>
-          <a:prstGeom prst="rect">
-            <a:avLst/>
-          </a:prstGeom>
-          <a:noFill/>
-        </p:spPr>
-        <p:txBody>
-          <a:bodyPr wrap="square" lIns="0" rIns="0" tIns="0" bIns="0" anchor="t">
-            <a:spAutoFit/>
-          </a:bodyPr>
-          <a:lstStyle/>
-          <a:p>
-            <a:pPr algn="l">
-              <a:lnSpc>
-                <a:spcPts val="725"/>
-              </a:lnSpc>
-            </a:pPr>
-            <a:r>
-              <a:rPr sz="500" b="1" spc="120">
-                <a:solidFill>
-                  <a:srgbClr val="6B7280"/>
-                </a:solidFill>
-                <a:latin typeface="맑은 고딕"/>
-                <a:ea typeface="맑은 고딕"/>
-              </a:rPr>
-              <a:t>MAIL</a:t>
-            </a:r>
-          </a:p>
-        </p:txBody>
-      </p:sp>
-      <p:sp>
-        <p:nvSpPr>
-          <p:cNvPr id="12" name="텍스트"/>
-          <p:cNvSpPr txBox="1"/>
-          <p:nvPr/>
-        </p:nvSpPr>
-        <p:spPr>
-          <a:xfrm>
-            <a:off x="2052000" y="1526400"/>
-            <a:ext cx="216000" cy="95251"/>
-          </a:xfrm>
-          <a:prstGeom prst="rect">
-            <a:avLst/>
-          </a:prstGeom>
-          <a:noFill/>
-        </p:spPr>
-        <p:txBody>
-          <a:bodyPr wrap="square" lIns="0" rIns="0" tIns="0" bIns="0" anchor="t">
-            <a:spAutoFit/>
-          </a:bodyPr>
-          <a:lstStyle/>
-          <a:p>
-            <a:pPr algn="l">
-              <a:lnSpc>
-                <a:spcPts val="725"/>
-              </a:lnSpc>
-            </a:pPr>
-            <a:r>
-              <a:rPr sz="500" b="1" spc="120">
-                <a:solidFill>
-                  <a:srgbClr val="6B7280"/>
-                </a:solidFill>
-                <a:latin typeface="맑은 고딕"/>
-                <a:ea typeface="맑은 고딕"/>
-              </a:rPr>
-              <a:t>ADDR</a:t>
             </a:r>
           </a:p>
         </p:txBody>
@@ -3541,8 +3591,8 @@
         </p:nvSpPr>
         <p:spPr>
           <a:xfrm>
-            <a:off x="2088000" y="0"/>
-            <a:ext cx="1152000" cy="1800000"/>
+            <a:off x="0" y="0"/>
+            <a:ext cx="1188000" cy="1800000"/>
           </a:xfrm>
           <a:prstGeom prst="rect">
             <a:avLst/>
@@ -3562,27 +3612,657 @@
           </a:p>
         </p:txBody>
       </p:sp>
-      <p:sp>
-        <p:nvSpPr>
-          <p:cNvPr id="3" name="Oval 2"/>
-          <p:cNvSpPr/>
-          <p:nvPr/>
-        </p:nvSpPr>
-        <p:spPr>
-          <a:xfrm>
-            <a:off x="2397600" y="633600"/>
-            <a:ext cx="532800" cy="532800"/>
-          </a:xfrm>
-          <a:prstGeom prst="ellipse">
-            <a:avLst/>
-          </a:prstGeom>
-          <a:noFill/>
-          <a:ln w="10800">
+      <p:cxnSp>
+        <p:nvCxnSpPr>
+          <p:cNvPr id="3" name="Connector 2"/>
+          <p:cNvCxnSpPr/>
+          <p:nvPr/>
+        </p:nvCxnSpPr>
+        <p:spPr>
+          <a:xfrm flipV="1">
+            <a:off x="0" y="1224000"/>
+            <a:ext cx="57600" cy="57600"/>
+          </a:xfrm>
+          <a:prstGeom prst="line">
+            <a:avLst/>
+          </a:prstGeom>
+          <a:ln w="3600">
             <a:solidFill>
               <a:srgbClr val="12151C"/>
             </a:solidFill>
           </a:ln>
         </p:spPr>
+      </p:cxnSp>
+      <p:cxnSp>
+        <p:nvCxnSpPr>
+          <p:cNvPr id="4" name="Connector 3"/>
+          <p:cNvCxnSpPr/>
+          <p:nvPr/>
+        </p:nvCxnSpPr>
+        <p:spPr>
+          <a:xfrm flipV="1">
+            <a:off x="0" y="1224000"/>
+            <a:ext cx="115200" cy="115200"/>
+          </a:xfrm>
+          <a:prstGeom prst="line">
+            <a:avLst/>
+          </a:prstGeom>
+          <a:ln w="3600">
+            <a:solidFill>
+              <a:srgbClr val="12151C"/>
+            </a:solidFill>
+          </a:ln>
+        </p:spPr>
+      </p:cxnSp>
+      <p:cxnSp>
+        <p:nvCxnSpPr>
+          <p:cNvPr id="5" name="Connector 4"/>
+          <p:cNvCxnSpPr/>
+          <p:nvPr/>
+        </p:nvCxnSpPr>
+        <p:spPr>
+          <a:xfrm flipV="1">
+            <a:off x="0" y="1224000"/>
+            <a:ext cx="172800" cy="172800"/>
+          </a:xfrm>
+          <a:prstGeom prst="line">
+            <a:avLst/>
+          </a:prstGeom>
+          <a:ln w="3600">
+            <a:solidFill>
+              <a:srgbClr val="12151C"/>
+            </a:solidFill>
+          </a:ln>
+        </p:spPr>
+      </p:cxnSp>
+      <p:cxnSp>
+        <p:nvCxnSpPr>
+          <p:cNvPr id="6" name="Connector 5"/>
+          <p:cNvCxnSpPr/>
+          <p:nvPr/>
+        </p:nvCxnSpPr>
+        <p:spPr>
+          <a:xfrm flipV="1">
+            <a:off x="0" y="1224000"/>
+            <a:ext cx="230400" cy="230400"/>
+          </a:xfrm>
+          <a:prstGeom prst="line">
+            <a:avLst/>
+          </a:prstGeom>
+          <a:ln w="3600">
+            <a:solidFill>
+              <a:srgbClr val="12151C"/>
+            </a:solidFill>
+          </a:ln>
+        </p:spPr>
+      </p:cxnSp>
+      <p:cxnSp>
+        <p:nvCxnSpPr>
+          <p:cNvPr id="7" name="Connector 6"/>
+          <p:cNvCxnSpPr/>
+          <p:nvPr/>
+        </p:nvCxnSpPr>
+        <p:spPr>
+          <a:xfrm flipV="1">
+            <a:off x="0" y="1224000"/>
+            <a:ext cx="288000" cy="288000"/>
+          </a:xfrm>
+          <a:prstGeom prst="line">
+            <a:avLst/>
+          </a:prstGeom>
+          <a:ln w="3600">
+            <a:solidFill>
+              <a:srgbClr val="12151C"/>
+            </a:solidFill>
+          </a:ln>
+        </p:spPr>
+      </p:cxnSp>
+      <p:cxnSp>
+        <p:nvCxnSpPr>
+          <p:cNvPr id="8" name="Connector 7"/>
+          <p:cNvCxnSpPr/>
+          <p:nvPr/>
+        </p:nvCxnSpPr>
+        <p:spPr>
+          <a:xfrm flipV="1">
+            <a:off x="0" y="1224000"/>
+            <a:ext cx="345600" cy="345600"/>
+          </a:xfrm>
+          <a:prstGeom prst="line">
+            <a:avLst/>
+          </a:prstGeom>
+          <a:ln w="3600">
+            <a:solidFill>
+              <a:srgbClr val="12151C"/>
+            </a:solidFill>
+          </a:ln>
+        </p:spPr>
+      </p:cxnSp>
+      <p:cxnSp>
+        <p:nvCxnSpPr>
+          <p:cNvPr id="9" name="Connector 8"/>
+          <p:cNvCxnSpPr/>
+          <p:nvPr/>
+        </p:nvCxnSpPr>
+        <p:spPr>
+          <a:xfrm flipV="1">
+            <a:off x="0" y="1224000"/>
+            <a:ext cx="403200" cy="403200"/>
+          </a:xfrm>
+          <a:prstGeom prst="line">
+            <a:avLst/>
+          </a:prstGeom>
+          <a:ln w="3600">
+            <a:solidFill>
+              <a:srgbClr val="12151C"/>
+            </a:solidFill>
+          </a:ln>
+        </p:spPr>
+      </p:cxnSp>
+      <p:cxnSp>
+        <p:nvCxnSpPr>
+          <p:cNvPr id="10" name="Connector 9"/>
+          <p:cNvCxnSpPr/>
+          <p:nvPr/>
+        </p:nvCxnSpPr>
+        <p:spPr>
+          <a:xfrm flipV="1">
+            <a:off x="0" y="1224000"/>
+            <a:ext cx="460800" cy="460800"/>
+          </a:xfrm>
+          <a:prstGeom prst="line">
+            <a:avLst/>
+          </a:prstGeom>
+          <a:ln w="3600">
+            <a:solidFill>
+              <a:srgbClr val="12151C"/>
+            </a:solidFill>
+          </a:ln>
+        </p:spPr>
+      </p:cxnSp>
+      <p:cxnSp>
+        <p:nvCxnSpPr>
+          <p:cNvPr id="11" name="Connector 10"/>
+          <p:cNvCxnSpPr/>
+          <p:nvPr/>
+        </p:nvCxnSpPr>
+        <p:spPr>
+          <a:xfrm flipV="1">
+            <a:off x="0" y="1224000"/>
+            <a:ext cx="518400" cy="518400"/>
+          </a:xfrm>
+          <a:prstGeom prst="line">
+            <a:avLst/>
+          </a:prstGeom>
+          <a:ln w="3600">
+            <a:solidFill>
+              <a:srgbClr val="12151C"/>
+            </a:solidFill>
+          </a:ln>
+        </p:spPr>
+      </p:cxnSp>
+      <p:cxnSp>
+        <p:nvCxnSpPr>
+          <p:cNvPr id="12" name="Connector 11"/>
+          <p:cNvCxnSpPr/>
+          <p:nvPr/>
+        </p:nvCxnSpPr>
+        <p:spPr>
+          <a:xfrm flipV="1">
+            <a:off x="0" y="1224000"/>
+            <a:ext cx="576000" cy="576000"/>
+          </a:xfrm>
+          <a:prstGeom prst="line">
+            <a:avLst/>
+          </a:prstGeom>
+          <a:ln w="3600">
+            <a:solidFill>
+              <a:srgbClr val="12151C"/>
+            </a:solidFill>
+          </a:ln>
+        </p:spPr>
+      </p:cxnSp>
+      <p:cxnSp>
+        <p:nvCxnSpPr>
+          <p:cNvPr id="13" name="Connector 12"/>
+          <p:cNvCxnSpPr/>
+          <p:nvPr/>
+        </p:nvCxnSpPr>
+        <p:spPr>
+          <a:xfrm flipV="1">
+            <a:off x="57600" y="1224000"/>
+            <a:ext cx="576000" cy="576000"/>
+          </a:xfrm>
+          <a:prstGeom prst="line">
+            <a:avLst/>
+          </a:prstGeom>
+          <a:ln w="3600">
+            <a:solidFill>
+              <a:srgbClr val="12151C"/>
+            </a:solidFill>
+          </a:ln>
+        </p:spPr>
+      </p:cxnSp>
+      <p:cxnSp>
+        <p:nvCxnSpPr>
+          <p:cNvPr id="14" name="Connector 13"/>
+          <p:cNvCxnSpPr/>
+          <p:nvPr/>
+        </p:nvCxnSpPr>
+        <p:spPr>
+          <a:xfrm flipV="1">
+            <a:off x="115200" y="1224000"/>
+            <a:ext cx="576000" cy="576000"/>
+          </a:xfrm>
+          <a:prstGeom prst="line">
+            <a:avLst/>
+          </a:prstGeom>
+          <a:ln w="3600">
+            <a:solidFill>
+              <a:srgbClr val="12151C"/>
+            </a:solidFill>
+          </a:ln>
+        </p:spPr>
+      </p:cxnSp>
+      <p:cxnSp>
+        <p:nvCxnSpPr>
+          <p:cNvPr id="15" name="Connector 14"/>
+          <p:cNvCxnSpPr/>
+          <p:nvPr/>
+        </p:nvCxnSpPr>
+        <p:spPr>
+          <a:xfrm flipV="1">
+            <a:off x="172800" y="1224000"/>
+            <a:ext cx="576000" cy="576000"/>
+          </a:xfrm>
+          <a:prstGeom prst="line">
+            <a:avLst/>
+          </a:prstGeom>
+          <a:ln w="3600">
+            <a:solidFill>
+              <a:srgbClr val="12151C"/>
+            </a:solidFill>
+          </a:ln>
+        </p:spPr>
+      </p:cxnSp>
+      <p:cxnSp>
+        <p:nvCxnSpPr>
+          <p:cNvPr id="16" name="Connector 15"/>
+          <p:cNvCxnSpPr/>
+          <p:nvPr/>
+        </p:nvCxnSpPr>
+        <p:spPr>
+          <a:xfrm flipV="1">
+            <a:off x="230400" y="1224000"/>
+            <a:ext cx="576000" cy="576000"/>
+          </a:xfrm>
+          <a:prstGeom prst="line">
+            <a:avLst/>
+          </a:prstGeom>
+          <a:ln w="3600">
+            <a:solidFill>
+              <a:srgbClr val="12151C"/>
+            </a:solidFill>
+          </a:ln>
+        </p:spPr>
+      </p:cxnSp>
+      <p:cxnSp>
+        <p:nvCxnSpPr>
+          <p:cNvPr id="17" name="Connector 16"/>
+          <p:cNvCxnSpPr/>
+          <p:nvPr/>
+        </p:nvCxnSpPr>
+        <p:spPr>
+          <a:xfrm flipV="1">
+            <a:off x="288000" y="1224000"/>
+            <a:ext cx="576000" cy="576000"/>
+          </a:xfrm>
+          <a:prstGeom prst="line">
+            <a:avLst/>
+          </a:prstGeom>
+          <a:ln w="3600">
+            <a:solidFill>
+              <a:srgbClr val="12151C"/>
+            </a:solidFill>
+          </a:ln>
+        </p:spPr>
+      </p:cxnSp>
+      <p:cxnSp>
+        <p:nvCxnSpPr>
+          <p:cNvPr id="18" name="Connector 17"/>
+          <p:cNvCxnSpPr/>
+          <p:nvPr/>
+        </p:nvCxnSpPr>
+        <p:spPr>
+          <a:xfrm flipV="1">
+            <a:off x="345600" y="1224000"/>
+            <a:ext cx="576000" cy="576000"/>
+          </a:xfrm>
+          <a:prstGeom prst="line">
+            <a:avLst/>
+          </a:prstGeom>
+          <a:ln w="3600">
+            <a:solidFill>
+              <a:srgbClr val="12151C"/>
+            </a:solidFill>
+          </a:ln>
+        </p:spPr>
+      </p:cxnSp>
+      <p:cxnSp>
+        <p:nvCxnSpPr>
+          <p:cNvPr id="19" name="Connector 18"/>
+          <p:cNvCxnSpPr/>
+          <p:nvPr/>
+        </p:nvCxnSpPr>
+        <p:spPr>
+          <a:xfrm flipV="1">
+            <a:off x="403200" y="1224000"/>
+            <a:ext cx="576000" cy="576000"/>
+          </a:xfrm>
+          <a:prstGeom prst="line">
+            <a:avLst/>
+          </a:prstGeom>
+          <a:ln w="3600">
+            <a:solidFill>
+              <a:srgbClr val="12151C"/>
+            </a:solidFill>
+          </a:ln>
+        </p:spPr>
+      </p:cxnSp>
+      <p:cxnSp>
+        <p:nvCxnSpPr>
+          <p:cNvPr id="20" name="Connector 19"/>
+          <p:cNvCxnSpPr/>
+          <p:nvPr/>
+        </p:nvCxnSpPr>
+        <p:spPr>
+          <a:xfrm flipV="1">
+            <a:off x="460800" y="1224000"/>
+            <a:ext cx="576000" cy="576000"/>
+          </a:xfrm>
+          <a:prstGeom prst="line">
+            <a:avLst/>
+          </a:prstGeom>
+          <a:ln w="3600">
+            <a:solidFill>
+              <a:srgbClr val="12151C"/>
+            </a:solidFill>
+          </a:ln>
+        </p:spPr>
+      </p:cxnSp>
+      <p:cxnSp>
+        <p:nvCxnSpPr>
+          <p:cNvPr id="21" name="Connector 20"/>
+          <p:cNvCxnSpPr/>
+          <p:nvPr/>
+        </p:nvCxnSpPr>
+        <p:spPr>
+          <a:xfrm flipV="1">
+            <a:off x="518400" y="1224000"/>
+            <a:ext cx="576000" cy="576000"/>
+          </a:xfrm>
+          <a:prstGeom prst="line">
+            <a:avLst/>
+          </a:prstGeom>
+          <a:ln w="3600">
+            <a:solidFill>
+              <a:srgbClr val="12151C"/>
+            </a:solidFill>
+          </a:ln>
+        </p:spPr>
+      </p:cxnSp>
+      <p:cxnSp>
+        <p:nvCxnSpPr>
+          <p:cNvPr id="22" name="Connector 21"/>
+          <p:cNvCxnSpPr/>
+          <p:nvPr/>
+        </p:nvCxnSpPr>
+        <p:spPr>
+          <a:xfrm flipV="1">
+            <a:off x="576000" y="1224000"/>
+            <a:ext cx="576000" cy="576000"/>
+          </a:xfrm>
+          <a:prstGeom prst="line">
+            <a:avLst/>
+          </a:prstGeom>
+          <a:ln w="3600">
+            <a:solidFill>
+              <a:srgbClr val="12151C"/>
+            </a:solidFill>
+          </a:ln>
+        </p:spPr>
+      </p:cxnSp>
+      <p:cxnSp>
+        <p:nvCxnSpPr>
+          <p:cNvPr id="23" name="Connector 22"/>
+          <p:cNvCxnSpPr/>
+          <p:nvPr/>
+        </p:nvCxnSpPr>
+        <p:spPr>
+          <a:xfrm flipV="1">
+            <a:off x="633600" y="1245600"/>
+            <a:ext cx="554400" cy="554400"/>
+          </a:xfrm>
+          <a:prstGeom prst="line">
+            <a:avLst/>
+          </a:prstGeom>
+          <a:ln w="3600">
+            <a:solidFill>
+              <a:srgbClr val="12151C"/>
+            </a:solidFill>
+          </a:ln>
+        </p:spPr>
+      </p:cxnSp>
+      <p:cxnSp>
+        <p:nvCxnSpPr>
+          <p:cNvPr id="24" name="Connector 23"/>
+          <p:cNvCxnSpPr/>
+          <p:nvPr/>
+        </p:nvCxnSpPr>
+        <p:spPr>
+          <a:xfrm flipV="1">
+            <a:off x="691200" y="1303200"/>
+            <a:ext cx="496800" cy="496800"/>
+          </a:xfrm>
+          <a:prstGeom prst="line">
+            <a:avLst/>
+          </a:prstGeom>
+          <a:ln w="3600">
+            <a:solidFill>
+              <a:srgbClr val="12151C"/>
+            </a:solidFill>
+          </a:ln>
+        </p:spPr>
+      </p:cxnSp>
+      <p:cxnSp>
+        <p:nvCxnSpPr>
+          <p:cNvPr id="25" name="Connector 24"/>
+          <p:cNvCxnSpPr/>
+          <p:nvPr/>
+        </p:nvCxnSpPr>
+        <p:spPr>
+          <a:xfrm flipV="1">
+            <a:off x="748800" y="1360800"/>
+            <a:ext cx="439200" cy="439200"/>
+          </a:xfrm>
+          <a:prstGeom prst="line">
+            <a:avLst/>
+          </a:prstGeom>
+          <a:ln w="3600">
+            <a:solidFill>
+              <a:srgbClr val="12151C"/>
+            </a:solidFill>
+          </a:ln>
+        </p:spPr>
+      </p:cxnSp>
+      <p:cxnSp>
+        <p:nvCxnSpPr>
+          <p:cNvPr id="26" name="Connector 25"/>
+          <p:cNvCxnSpPr/>
+          <p:nvPr/>
+        </p:nvCxnSpPr>
+        <p:spPr>
+          <a:xfrm flipV="1">
+            <a:off x="806400" y="1418400"/>
+            <a:ext cx="381600" cy="381600"/>
+          </a:xfrm>
+          <a:prstGeom prst="line">
+            <a:avLst/>
+          </a:prstGeom>
+          <a:ln w="3600">
+            <a:solidFill>
+              <a:srgbClr val="12151C"/>
+            </a:solidFill>
+          </a:ln>
+        </p:spPr>
+      </p:cxnSp>
+      <p:cxnSp>
+        <p:nvCxnSpPr>
+          <p:cNvPr id="27" name="Connector 26"/>
+          <p:cNvCxnSpPr/>
+          <p:nvPr/>
+        </p:nvCxnSpPr>
+        <p:spPr>
+          <a:xfrm flipV="1">
+            <a:off x="864000" y="1476000"/>
+            <a:ext cx="324000" cy="324000"/>
+          </a:xfrm>
+          <a:prstGeom prst="line">
+            <a:avLst/>
+          </a:prstGeom>
+          <a:ln w="3600">
+            <a:solidFill>
+              <a:srgbClr val="12151C"/>
+            </a:solidFill>
+          </a:ln>
+        </p:spPr>
+      </p:cxnSp>
+      <p:cxnSp>
+        <p:nvCxnSpPr>
+          <p:cNvPr id="28" name="Connector 27"/>
+          <p:cNvCxnSpPr/>
+          <p:nvPr/>
+        </p:nvCxnSpPr>
+        <p:spPr>
+          <a:xfrm flipV="1">
+            <a:off x="921600" y="1533600"/>
+            <a:ext cx="266400" cy="266400"/>
+          </a:xfrm>
+          <a:prstGeom prst="line">
+            <a:avLst/>
+          </a:prstGeom>
+          <a:ln w="3600">
+            <a:solidFill>
+              <a:srgbClr val="12151C"/>
+            </a:solidFill>
+          </a:ln>
+        </p:spPr>
+      </p:cxnSp>
+      <p:cxnSp>
+        <p:nvCxnSpPr>
+          <p:cNvPr id="29" name="Connector 28"/>
+          <p:cNvCxnSpPr/>
+          <p:nvPr/>
+        </p:nvCxnSpPr>
+        <p:spPr>
+          <a:xfrm flipV="1">
+            <a:off x="979200" y="1591200"/>
+            <a:ext cx="208800" cy="208800"/>
+          </a:xfrm>
+          <a:prstGeom prst="line">
+            <a:avLst/>
+          </a:prstGeom>
+          <a:ln w="3600">
+            <a:solidFill>
+              <a:srgbClr val="12151C"/>
+            </a:solidFill>
+          </a:ln>
+        </p:spPr>
+      </p:cxnSp>
+      <p:cxnSp>
+        <p:nvCxnSpPr>
+          <p:cNvPr id="30" name="Connector 29"/>
+          <p:cNvCxnSpPr/>
+          <p:nvPr/>
+        </p:nvCxnSpPr>
+        <p:spPr>
+          <a:xfrm flipV="1">
+            <a:off x="1036800" y="1648800"/>
+            <a:ext cx="151200" cy="151200"/>
+          </a:xfrm>
+          <a:prstGeom prst="line">
+            <a:avLst/>
+          </a:prstGeom>
+          <a:ln w="3600">
+            <a:solidFill>
+              <a:srgbClr val="12151C"/>
+            </a:solidFill>
+          </a:ln>
+        </p:spPr>
+      </p:cxnSp>
+      <p:cxnSp>
+        <p:nvCxnSpPr>
+          <p:cNvPr id="31" name="Connector 30"/>
+          <p:cNvCxnSpPr/>
+          <p:nvPr/>
+        </p:nvCxnSpPr>
+        <p:spPr>
+          <a:xfrm flipV="1">
+            <a:off x="1094400" y="1706400"/>
+            <a:ext cx="93600" cy="93600"/>
+          </a:xfrm>
+          <a:prstGeom prst="line">
+            <a:avLst/>
+          </a:prstGeom>
+          <a:ln w="3600">
+            <a:solidFill>
+              <a:srgbClr val="12151C"/>
+            </a:solidFill>
+          </a:ln>
+        </p:spPr>
+      </p:cxnSp>
+      <p:cxnSp>
+        <p:nvCxnSpPr>
+          <p:cNvPr id="32" name="Connector 31"/>
+          <p:cNvCxnSpPr/>
+          <p:nvPr/>
+        </p:nvCxnSpPr>
+        <p:spPr>
+          <a:xfrm flipV="1">
+            <a:off x="1152000" y="1764000"/>
+            <a:ext cx="36000" cy="36000"/>
+          </a:xfrm>
+          <a:prstGeom prst="line">
+            <a:avLst/>
+          </a:prstGeom>
+          <a:ln w="3600">
+            <a:solidFill>
+              <a:srgbClr val="12151C"/>
+            </a:solidFill>
+          </a:ln>
+        </p:spPr>
+      </p:cxnSp>
+      <p:sp>
+        <p:nvSpPr>
+          <p:cNvPr id="33" name="Oval 32"/>
+          <p:cNvSpPr/>
+          <p:nvPr/>
+        </p:nvSpPr>
+        <p:spPr>
+          <a:xfrm>
+            <a:off x="216000" y="252000"/>
+            <a:ext cx="288000" cy="288000"/>
+          </a:xfrm>
+          <a:prstGeom prst="ellipse">
+            <a:avLst/>
+          </a:prstGeom>
+          <a:noFill/>
+          <a:ln w="5760">
+            <a:solidFill>
+              <a:srgbClr val="12151C"/>
+            </a:solidFill>
+          </a:ln>
+        </p:spPr>
         <p:txBody>
           <a:bodyPr rtlCol="0" anchor="ctr"/>
           <a:lstStyle/>
@@ -3593,14 +4273,14 @@
       </p:sp>
       <p:sp>
         <p:nvSpPr>
-          <p:cNvPr id="4" name="텍스트"/>
+          <p:cNvPr id="34" name="텍스트"/>
           <p:cNvSpPr txBox="1"/>
           <p:nvPr/>
         </p:nvSpPr>
         <p:spPr>
           <a:xfrm>
-            <a:off x="2304000" y="684000"/>
-            <a:ext cx="720000" cy="432000"/>
+            <a:off x="216000" y="252000"/>
+            <a:ext cx="288000" cy="288000"/>
           </a:xfrm>
           <a:prstGeom prst="rect">
             <a:avLst/>
@@ -3615,11 +4295,11 @@
           <a:p>
             <a:pPr algn="ctr">
               <a:lnSpc>
-                <a:spcPts val="4350"/>
+                <a:spcPts val="2030"/>
               </a:lnSpc>
             </a:pPr>
             <a:r>
-              <a:rPr sz="3000" b="1">
+              <a:rPr sz="1400" b="1">
                 <a:solidFill>
                   <a:srgbClr val="12151C"/>
                 </a:solidFill>
@@ -3633,14 +4313,14 @@
       </p:sp>
       <p:sp>
         <p:nvSpPr>
-          <p:cNvPr id="5" name="텍스트"/>
+          <p:cNvPr id="35" name="텍스트"/>
           <p:cNvSpPr txBox="1"/>
           <p:nvPr/>
         </p:nvSpPr>
         <p:spPr>
           <a:xfrm>
-            <a:off x="252000" y="540000"/>
-            <a:ext cx="1620000" cy="720000"/>
+            <a:off x="216000" y="1440000"/>
+            <a:ext cx="828000" cy="142876"/>
           </a:xfrm>
           <a:prstGeom prst="rect">
             <a:avLst/>
@@ -3655,49 +4335,154 @@
           <a:p>
             <a:pPr algn="l">
               <a:lnSpc>
-                <a:spcPts val="1739"/>
+                <a:spcPts val="1087"/>
               </a:lnSpc>
             </a:pPr>
             <a:r>
-              <a:rPr sz="1200" b="1">
+              <a:rPr sz="750" b="1" spc="100">
                 <a:solidFill>
                   <a:srgbClr val="12151C"/>
                 </a:solidFill>
                 <a:latin typeface="맑은 고딕"/>
                 <a:ea typeface="맑은 고딕"/>
               </a:rPr>
-              <a:t>이웃의 안부를</a:t>
-            </a:r>
-          </a:p>
+              <a:t>취급 품목</a:t>
+            </a:r>
+          </a:p>
+        </p:txBody>
+      </p:sp>
+      <p:sp>
+        <p:nvSpPr>
+          <p:cNvPr id="36" name="텍스트"/>
+          <p:cNvSpPr txBox="1"/>
+          <p:nvPr/>
+        </p:nvSpPr>
+        <p:spPr>
+          <a:xfrm>
+            <a:off x="1440000" y="223200"/>
+            <a:ext cx="1080000" cy="99061"/>
+          </a:xfrm>
+          <a:prstGeom prst="rect">
+            <a:avLst/>
+          </a:prstGeom>
+          <a:noFill/>
+        </p:spPr>
+        <p:txBody>
+          <a:bodyPr wrap="square" lIns="0" rIns="0" tIns="0" bIns="0" anchor="t">
+            <a:spAutoFit/>
+          </a:bodyPr>
+          <a:lstStyle/>
           <a:p>
             <a:pPr algn="l">
               <a:lnSpc>
-                <a:spcPts val="1739"/>
+                <a:spcPts val="754"/>
               </a:lnSpc>
             </a:pPr>
             <a:r>
-              <a:rPr sz="1200" b="1">
+              <a:rPr sz="520" b="1" spc="240">
+                <a:solidFill>
+                  <a:srgbClr val="6C3747"/>
+                </a:solidFill>
+                <a:latin typeface="맑은 고딕"/>
+                <a:ea typeface="맑은 고딕"/>
+              </a:rPr>
+              <a:t>취급 품목</a:t>
+            </a:r>
+          </a:p>
+        </p:txBody>
+      </p:sp>
+      <p:cxnSp>
+        <p:nvCxnSpPr>
+          <p:cNvPr id="37" name="Connector 36"/>
+          <p:cNvCxnSpPr/>
+          <p:nvPr/>
+        </p:nvCxnSpPr>
+        <p:spPr>
+          <a:xfrm>
+            <a:off x="1440000" y="360000"/>
+            <a:ext cx="1548000" cy="0"/>
+          </a:xfrm>
+          <a:prstGeom prst="line">
+            <a:avLst/>
+          </a:prstGeom>
+          <a:ln w="3600">
+            <a:solidFill>
+              <a:srgbClr val="FFD7DF"/>
+            </a:solidFill>
+          </a:ln>
+        </p:spPr>
+      </p:cxnSp>
+      <p:sp>
+        <p:nvSpPr>
+          <p:cNvPr id="38" name="텍스트"/>
+          <p:cNvSpPr txBox="1"/>
+          <p:nvPr/>
+        </p:nvSpPr>
+        <p:spPr>
+          <a:xfrm>
+            <a:off x="1440000" y="403200"/>
+            <a:ext cx="1296000" cy="133351"/>
+          </a:xfrm>
+          <a:prstGeom prst="rect">
+            <a:avLst/>
+          </a:prstGeom>
+          <a:noFill/>
+        </p:spPr>
+        <p:txBody>
+          <a:bodyPr wrap="square" lIns="0" rIns="0" tIns="0" bIns="0" anchor="t">
+            <a:spAutoFit/>
+          </a:bodyPr>
+          <a:lstStyle/>
+          <a:p>
+            <a:pPr algn="l">
+              <a:lnSpc>
+                <a:spcPts val="1015"/>
+              </a:lnSpc>
+            </a:pPr>
+            <a:r>
+              <a:rPr sz="700" b="0">
                 <a:solidFill>
                   <a:srgbClr val="12151C"/>
                 </a:solidFill>
                 <a:latin typeface="맑은 고딕"/>
                 <a:ea typeface="맑은 고딕"/>
               </a:rPr>
-              <a:t>먼저 묻는 가게</a:t>
-            </a:r>
-          </a:p>
-        </p:txBody>
-      </p:sp>
-      <p:sp>
-        <p:nvSpPr>
-          <p:cNvPr id="6" name="텍스트"/>
+              <a:t>정기 구독</a:t>
+            </a:r>
+          </a:p>
+        </p:txBody>
+      </p:sp>
+      <p:cxnSp>
+        <p:nvCxnSpPr>
+          <p:cNvPr id="39" name="Connector 38"/>
+          <p:cNvCxnSpPr/>
+          <p:nvPr/>
+        </p:nvCxnSpPr>
+        <p:spPr>
+          <a:xfrm>
+            <a:off x="1440000" y="561600"/>
+            <a:ext cx="1548000" cy="0"/>
+          </a:xfrm>
+          <a:prstGeom prst="line">
+            <a:avLst/>
+          </a:prstGeom>
+          <a:ln w="3600">
+            <a:solidFill>
+              <a:srgbClr val="FFD7DF"/>
+            </a:solidFill>
+          </a:ln>
+        </p:spPr>
+      </p:cxnSp>
+      <p:sp>
+        <p:nvSpPr>
+          <p:cNvPr id="40" name="텍스트"/>
           <p:cNvSpPr txBox="1"/>
           <p:nvPr/>
         </p:nvSpPr>
         <p:spPr>
           <a:xfrm>
-            <a:off x="252000" y="1512000"/>
-            <a:ext cx="1584000" cy="123826"/>
+            <a:off x="1440000" y="604800"/>
+            <a:ext cx="1296000" cy="133351"/>
           </a:xfrm>
           <a:prstGeom prst="rect">
             <a:avLst/>
@@ -3712,18 +4497,140 @@
           <a:p>
             <a:pPr algn="l">
               <a:lnSpc>
-                <a:spcPts val="942"/>
+                <a:spcPts val="1015"/>
               </a:lnSpc>
             </a:pPr>
             <a:r>
-              <a:rPr sz="650" b="1" spc="200">
+              <a:rPr sz="700" b="0">
+                <a:solidFill>
+                  <a:srgbClr val="12151C"/>
+                </a:solidFill>
+                <a:latin typeface="맑은 고딕"/>
+                <a:ea typeface="맑은 고딕"/>
+              </a:rPr>
+              <a:t>소품 · 문구</a:t>
+            </a:r>
+          </a:p>
+        </p:txBody>
+      </p:sp>
+      <p:cxnSp>
+        <p:nvCxnSpPr>
+          <p:cNvPr id="41" name="Connector 40"/>
+          <p:cNvCxnSpPr/>
+          <p:nvPr/>
+        </p:nvCxnSpPr>
+        <p:spPr>
+          <a:xfrm>
+            <a:off x="1440000" y="763200"/>
+            <a:ext cx="1548000" cy="0"/>
+          </a:xfrm>
+          <a:prstGeom prst="line">
+            <a:avLst/>
+          </a:prstGeom>
+          <a:ln w="3600">
+            <a:solidFill>
+              <a:srgbClr val="FFD7DF"/>
+            </a:solidFill>
+          </a:ln>
+        </p:spPr>
+      </p:cxnSp>
+      <p:sp>
+        <p:nvSpPr>
+          <p:cNvPr id="42" name="텍스트"/>
+          <p:cNvSpPr txBox="1"/>
+          <p:nvPr/>
+        </p:nvSpPr>
+        <p:spPr>
+          <a:xfrm>
+            <a:off x="1440000" y="806400"/>
+            <a:ext cx="1296000" cy="133351"/>
+          </a:xfrm>
+          <a:prstGeom prst="rect">
+            <a:avLst/>
+          </a:prstGeom>
+          <a:noFill/>
+        </p:spPr>
+        <p:txBody>
+          <a:bodyPr wrap="square" lIns="0" rIns="0" tIns="0" bIns="0" anchor="t">
+            <a:spAutoFit/>
+          </a:bodyPr>
+          <a:lstStyle/>
+          <a:p>
+            <a:pPr algn="l">
+              <a:lnSpc>
+                <a:spcPts val="1015"/>
+              </a:lnSpc>
+            </a:pPr>
+            <a:r>
+              <a:rPr sz="700" b="0">
+                <a:solidFill>
+                  <a:srgbClr val="12151C"/>
+                </a:solidFill>
+                <a:latin typeface="맑은 고딕"/>
+                <a:ea typeface="맑은 고딕"/>
+              </a:rPr>
+              <a:t>당일 배송</a:t>
+            </a:r>
+          </a:p>
+        </p:txBody>
+      </p:sp>
+      <p:cxnSp>
+        <p:nvCxnSpPr>
+          <p:cNvPr id="43" name="Connector 42"/>
+          <p:cNvCxnSpPr/>
+          <p:nvPr/>
+        </p:nvCxnSpPr>
+        <p:spPr>
+          <a:xfrm>
+            <a:off x="1440000" y="964800"/>
+            <a:ext cx="1548000" cy="0"/>
+          </a:xfrm>
+          <a:prstGeom prst="line">
+            <a:avLst/>
+          </a:prstGeom>
+          <a:ln w="3600">
+            <a:solidFill>
+              <a:srgbClr val="FFD7DF"/>
+            </a:solidFill>
+          </a:ln>
+        </p:spPr>
+      </p:cxnSp>
+      <p:sp>
+        <p:nvSpPr>
+          <p:cNvPr id="44" name="텍스트"/>
+          <p:cNvSpPr txBox="1"/>
+          <p:nvPr/>
+        </p:nvSpPr>
+        <p:spPr>
+          <a:xfrm>
+            <a:off x="1440000" y="1569600"/>
+            <a:ext cx="1548000" cy="114301"/>
+          </a:xfrm>
+          <a:prstGeom prst="rect">
+            <a:avLst/>
+          </a:prstGeom>
+          <a:noFill/>
+        </p:spPr>
+        <p:txBody>
+          <a:bodyPr wrap="square" lIns="0" rIns="0" tIns="0" bIns="0" anchor="t">
+            <a:spAutoFit/>
+          </a:bodyPr>
+          <a:lstStyle/>
+          <a:p>
+            <a:pPr algn="l">
+              <a:lnSpc>
+                <a:spcPts val="869"/>
+              </a:lnSpc>
+            </a:pPr>
+            <a:r>
+              <a:rPr sz="600" b="0">
                 <a:solidFill>
                   <a:srgbClr val="6C3747"/>
                 </a:solidFill>
                 <a:latin typeface="맑은 고딕"/>
                 <a:ea typeface="맑은 고딕"/>
               </a:rPr>
-              <a:t>상호명</a:t>
+              <a:t>평일 09:00 – 19:00   |   www.example.com</a:t>
             </a:r>
           </a:p>
         </p:txBody>
